--- a/spatial_cognition/spatial_cognition_lecture_3.pptx
+++ b/spatial_cognition/spatial_cognition_lecture_3.pptx
@@ -872,19 +872,19 @@
           <a:p/>
           <a:p>
             <a:r>
-              <a:t>A 2017 review found no spatial cells reported in reptiles, which is an absence of evidence rather than evidence of absence. Grid cells have so far been found only in mammals: rats, mice, bats, monkeys, and people. So place cells are not what mammals added.</a:t>
+              <a:t>A 2017 review found no spatial cells reported in reptiles, which is an absence of evidence rather than evidence of absence. Grid cells have so far been found only in mammals: rats, mice, bats, monkeys, and people. So place cells are not new in mammals.</a:t>
             </a:r>
           </a:p>
           <a:p/>
           <a:p>
             <a:r>
-              <a:t>What did mammals elaborate? As far as the evidence goes, mammals have a dentate gyrus, with no agreed counterpart in reptiles or birds. The mammalian hippocampus has more parts, several with more than one layer of cells, and signals pass through them mostly one way. Beside them lies an entorhinal cortex, with its grid system. And the mammalian hippocampus has stronger ties to the neocortex and weaker ones to the septum below it. Nocturnal mammals also have larger smell structures.</a:t>
+              <a:t>What is new in the mammalian version? As far as the evidence goes, mammals have a dentate gyrus, with no agreed counterpart in reptiles or birds. The mammalian hippocampus has more parts, several with more than one layer of cells, and signals pass through them mostly one way. Beside them lies an entorhinal cortex, with its grid system. And the mammalian hippocampus has stronger ties to the neocortex and weaker ones to the septum below it. Nocturnal mammals also have larger smell structures.</a:t>
             </a:r>
           </a:p>
           <a:p/>
           <a:p>
             <a:r>
-              <a:t>The region is agreed to be the same region across these animals, but which part matches which is argued. One reviewer suggests that birds and mammals reached memory for many places partly in parallel.</a:t>
+              <a:t>The region is agreed to be the same region across these animals, but which part matches which is argued. One reviewer suggests that memory for many places arose partly in parallel in birds and in mammals.</a:t>
             </a:r>
           </a:p>
         </p:txBody>
@@ -954,7 +954,7 @@
           <a:lstStyle/>
           <a:p>
             <a:r>
-              <a:t>The spatial cells appear in rat pups in a particular order. Head-direction cells are adultlike at about two weeks old, around the time the eyes open, and they act together as one ring even before single cells settle. Border cells are present by about 17 days. Place cells are present at 16 to 17 days, but are the slowest to mature, into the sixth week. Grid cells appear last, at about 20 to 21 days, and mature almost at once.</a:t>
+              <a:t>The spatial cells appear in rat pups in a particular order. Head-direction cells are adultlike at about two weeks old, around the time the eyes open, and they act together as one ring even before single cells settle. Place cells are present at 16 to 17 days, but are the slowest to mature, into the sixth week. Border cells are present by about 17 days. Grid cells appear last, at about 20 to 21 days, and mature almost at once.</a:t>
             </a:r>
           </a:p>
           <a:p/>
@@ -966,7 +966,7 @@
           <a:p/>
           <a:p>
             <a:r>
-              <a:t>A map can also change in adulthood. London taxi drivers train for three to four years to learn the city’s streets. One study followed 79 men through that training. The 39 who qualified gained gray matter in the back part of the hippocampus; those who failed, and a control group, did not. The qualifiers also got worse at recalling a complex drawing. The study followed the same people over time, which is a strength, but they were not randomly assigned to train. The qualifiers also trained more hours a week, and a predisposition cannot be ruled out.</a:t>
+              <a:t>A map can also change in adulthood. London taxi drivers train for three to four years to learn the city’s streets. One research team followed 79 men through that training. The 39 who qualified gained gray matter in the back part of the hippocampus; those who failed, and a control group, did not. The qualifiers also got worse at recalling a complex drawing. The researchers followed the same people over time, which is a strength, but the trainees were not randomly assigned to train. The qualifiers also trained more hours a week, and a predisposition cannot be ruled out.</a:t>
             </a:r>
           </a:p>
           <a:p/>
@@ -1055,7 +1055,7 @@
           <a:p/>
           <a:p>
             <a:r>
-              <a:t>The tissue that does this work is old too. A goldfish, a turtle, a bird, and a rat all lose the ability to find a place by its position when a corresponding region of the forebrain is damaged. All four can still find a goal marked by a cue. That region is the same region in each line, inherited from a common ancestor, and reworked in each. In a goldfish, it sits on the side of the forebrain, and its cells respond to heading and to walls. In a rat, it is a hippocampus with a dentate gyrus, and a grid system beside it. One reviewer’s summary is that across reptiles, birds, and mammals, what the hippocampus does has changed much less than how it is built. Caching birds keep thousands of hiding places apart without a dentate gyrus, the part thought to keep similar places apart in mammals. How they do it is not yet known.</a:t>
+              <a:t>The tissue that does this work is old too. A goldfish, a turtle, a bird, and a rat are all impaired at finding a place by its position when a corresponding region of the forebrain is damaged. All four can still find a goal marked by a cue. That region is the same region in each line, inherited from a common ancestor, and reworked in each. In a goldfish, it sits on the side of the forebrain, and its cells respond to heading, to walls, and to swimming speed. In a rat, it is a hippocampus with a dentate gyrus, and a grid system beside it. One reviewer’s summary is that across reptiles, birds, and mammals, what the hippocampus does has changed much less than how it is built. Caching birds keep thousands of hiding places apart without a dentate gyrus, the part thought to keep similar places apart in mammals. How they do it is not yet known.</a:t>
             </a:r>
           </a:p>
           <a:p/>
@@ -1149,7 +1149,7 @@
           <a:p/>
           <a:p>
             <a:r>
-              <a:t>The study followed the same people over time, which is better than comparing drivers with non-drivers at one moment. But people were not randomly assigned to train, the qualifiers trained more hours a week, and a predisposition cannot be ruled out. A study of phone navigation would face the same problem in a sharper form. People who already find their way well may be the ones who choose not to use a phone. Groups usually arrive at the design that would settle it: randomly assigning people to navigate with or without directions for months. Then they notice how hard that would be to run.</a:t>
+              <a:t>The researchers followed the same people over time, which is better than comparing drivers with non-drivers at one moment. But people were not randomly assigned to train, the qualifiers trained more hours a week, and a predisposition cannot be ruled out. A study of phone navigation would face the same problem in a sharper form. People who already find their way well may be the ones who choose not to use a phone. Groups usually arrive at the design that would settle it: randomly assigning people to navigate with or without directions for months. Then they notice how hard that would be to run.</a:t>
             </a:r>
           </a:p>
           <a:p/>
@@ -1748,7 +1748,7 @@
           <a:p/>
           <a:p>
             <a:r>
-              <a:t>This loop is the mammalian form. Reptiles and birds have a hippocampus in the same place, connected to the thalamus, to the septum below it and to the cortex above it. But its two or three parts are connected back and forth, rather than mostly one way, and no part of it has been agreed to match the dentate gyrus.</a:t>
+              <a:t>This loop is the mammalian form. Reptiles and birds have a hippocampus in the same place, connected to the thalamus, to the septum below it, and to the cortex above it. But its two or three parts are connected back and forth, rather than mostly one way, and no part of it has been agreed to match the dentate gyrus.</a:t>
             </a:r>
           </a:p>
         </p:txBody>
@@ -5815,7 +5815,7 @@
                 </a:solidFill>
                 <a:latin typeface="Calibri"/>
               </a:rPr>
-              <a:t>What Mammals Elaborated</a:t>
+              <a:t>What Is New in Mammals</a:t>
             </a:r>
           </a:p>
         </p:txBody>
@@ -5849,7 +5849,7 @@
                 </a:solidFill>
                 <a:latin typeface="Calibri"/>
               </a:rPr>
-              <a:t>Head-direction cells are found in fish and birds, place cells in birds; grid cells so far only in mammals. As far as the evidence goes, mammals elaborated an inherited region.</a:t>
+              <a:t>Head-direction cells are found in fish and birds, place cells in birds; grid cells so far only in mammals. As far as the evidence goes, mammals have an elaborated version of an inherited region.</a:t>
             </a:r>
           </a:p>
         </p:txBody>
